--- a/decks/hist-medicine/hist-medicine_ch1_medieval-england.pptx
+++ b/decks/hist-medicine/hist-medicine_ch1_medieval-england.pptx
@@ -126,31 +126,31 @@
   <p:extLst>
     <p:ext uri="{521415D9-36F7-43E2-AB2F-B90AF26B5E84}">
       <p14:sectionLst xmlns:p14="http://schemas.microsoft.com/office/powerpoint/2010/main">
-        <p14:section name="Opening" id="{9f4659d5-f615-dcf0-2572-e0c87c1b216a}">
+        <p14:section name="Opening" id="{2caa3098-5a06-3464-4e3d-d3e87bb2d41d}">
           <p14:sldIdLst>
             <p14:sldId id="256"/>
           </p14:sldIdLst>
         </p14:section>
-        <p14:section name="Gate" id="{d64b77e1-7397-1328-eb62-ac98be1c5b65}">
+        <p14:section name="Gate" id="{5fe8448d-56f0-9463-ee73-f3e634079913}">
           <p14:sldIdLst>
             <p14:sldId id="257"/>
             <p14:sldId id="258"/>
             <p14:sldId id="259"/>
           </p14:sldIdLst>
         </p14:section>
-        <p14:section name="Pre-teach" id="{775745fa-cc63-af4d-fd14-7b477df1eb3b}">
+        <p14:section name="Pre-teach" id="{988901b7-70e9-4c6f-61ad-53f40dcc28b5}">
           <p14:sldIdLst>
             <p14:sldId id="260"/>
             <p14:sldId id="261"/>
           </p14:sldIdLst>
         </p14:section>
-        <p14:section name="Read-along" id="{59bc389f-569a-5ee4-d55b-62773383f789}">
+        <p14:section name="Read-along" id="{b8529ce6-6267-3562-11e9-d8faa894332a}">
           <p14:sldIdLst>
             <p14:sldId id="262"/>
             <p14:sldId id="263"/>
           </p14:sldIdLst>
         </p14:section>
-        <p14:section name="Teach" id="{a911f788-a34b-0a0e-ad98-bea231efa565}">
+        <p14:section name="Teach" id="{cb616dc4-321d-2212-d4fa-874a17dd9efe}">
           <p14:sldIdLst>
             <p14:sldId id="264"/>
             <p14:sldId id="265"/>
@@ -158,7 +158,7 @@
             <p14:sldId id="267"/>
           </p14:sldIdLst>
         </p14:section>
-        <p14:section name="Routes" id="{ff5452bb-ec6d-9a30-0cdf-0df9e2b5cb3e}">
+        <p14:section name="Routes" id="{e1cf32aa-493b-6ef0-7174-f27b61ffcb0e}">
           <p14:sldIdLst>
             <p14:sldId id="268"/>
             <p14:sldId id="269"/>
@@ -166,12 +166,12 @@
             <p14:sldId id="271"/>
           </p14:sldIdLst>
         </p14:section>
-        <p14:section name="Close" id="{e02f7423-ab1b-1e53-68d6-62c06479be1a}">
+        <p14:section name="Close" id="{28b2fa90-8816-6905-79fe-2301d9cb1afe}">
           <p14:sldIdLst>
             <p14:sldId id="272"/>
           </p14:sldIdLst>
         </p14:section>
-        <p14:section name="Answers" id="{4f7f8079-793d-e3d8-ce41-9c30f157ec40}">
+        <p14:section name="Answers" id="{16b72e6a-91d8-3fa3-a579-a8c8497377ee}">
           <p14:sldIdLst>
             <p14:sldId id="273"/>
             <p14:sldId id="274"/>
@@ -1602,7 +1602,7 @@
               <a:t>Do now — retrieval. Silent, no notes, no help: recall comes before any support. Give about four minutes.
 1. Which event marks the beginning of the medieval period in England?  →  A   The Norman Conquest in 1066
 2. Most medieval people were ___ who worked on the land for a lord.  →  peasants
-3. Why was the harvest the most important event of the year for a village such as Walsham?  →  A   A bad harvest meant hunger for the winter and, after several bad years, famine
+3. Why was the harvest the most important event of the year for a village such as Walsham?  →  D   A bad harvest meant hunger for the winter and, after several bad years, famine
 Circulate: who gets 3/3 (Stretch route), 2/3 (Core), 0–1 (Support)? Use this to route pupils later in the lesson.</a:t>
             </a:r>
             <a:endParaRPr lang="en-US" dirty="0"/>
@@ -1785,7 +1785,7 @@
               <a:t>Do now — retrieval. Silent, no notes, no help: recall comes before any support. Give about four minutes.
 1. Which event marks the beginning of the medieval period in England?  →  A   The Norman Conquest in 1066
 2. Most medieval people were ___ who worked on the land for a lord.  →  peasants
-3. Why was the harvest the most important event of the year for a village such as Walsham?  →  A   A bad harvest meant hunger for the winter and, after several bad years, famine
+3. Why was the harvest the most important event of the year for a village such as Walsham?  →  D   A bad harvest meant hunger for the winter and, after several bad years, famine
 Circulate: who gets 3/3 (Stretch route), 2/3 (Core), 0–1 (Support)? Use this to route pupils later in the lesson.</a:t>
             </a:r>
             <a:endParaRPr lang="en-US" dirty="0"/>
@@ -1877,7 +1877,7 @@
               <a:t>Answers — pupils mark their own in a different colour, then hands up for 3/3, 2/3, 1/3.
 1. A   The Norman Conquest in 1066. The medieval period in England runs from the Norman Conquest of 1066 to the start of the Tudor dynasty in 1485.
 2. peasants. Most of the population were peasants, farming land they did not own under the feudal system.
-3. A   A bad harvest meant hunger for the winter and, after several bad years, famine. The village lived on what it grew. A failed harvest meant hunger, and repeated failure meant famine and death.
+3. D   A bad harvest meant hunger for the winter and, after several bad years, famine. The village lived on what it grew. A failed harvest meant hunger, and repeated failure meant famine and death.
 Say the route each score points to: 3/3 Stretch, 2/3 Core, 0–1 Support. Pupils may choose to move up.</a:t>
             </a:r>
             <a:endParaRPr lang="en-US" dirty="0"/>
@@ -12042,7 +12042,7 @@
                 <a:ea typeface="Calibri" pitchFamily="34" charset="-122"/>
                 <a:cs typeface="Calibri" pitchFamily="34" charset="-120"/>
               </a:rPr>
-              <a:t>The Black Death in 1348</a:t>
+              <a:t>Henry VIII's split from the Catholic Church in 1534</a:t>
             </a:r>
             <a:endParaRPr lang="en-US" sz="2400" dirty="0"/>
           </a:p>
@@ -12079,7 +12079,7 @@
                 <a:ea typeface="Calibri" pitchFamily="34" charset="-122"/>
                 <a:cs typeface="Calibri" pitchFamily="34" charset="-120"/>
               </a:rPr>
-              <a:t>The start of the Tudor dynasty in 1485</a:t>
+              <a:t>The Black Death in 1348</a:t>
             </a:r>
             <a:endParaRPr lang="en-US" sz="2400" dirty="0"/>
           </a:p>
@@ -12116,7 +12116,7 @@
                 <a:ea typeface="Calibri" pitchFamily="34" charset="-122"/>
                 <a:cs typeface="Calibri" pitchFamily="34" charset="-120"/>
               </a:rPr>
-              <a:t>Henry VIII's split from the Catholic Church in 1534</a:t>
+              <a:t>The start of the Tudor dynasty in 1485</a:t>
             </a:r>
             <a:endParaRPr lang="en-US" sz="2400" dirty="0"/>
           </a:p>
@@ -13187,7 +13187,7 @@
                 <a:ea typeface="Calibri" pitchFamily="34" charset="-122"/>
                 <a:cs typeface="Calibri" pitchFamily="34" charset="-120"/>
               </a:rPr>
-              <a:t>A bad harvest meant hunger for the winter and, after several bad years, famine</a:t>
+              <a:t>It was when the lord of the manor chose a new king</a:t>
             </a:r>
             <a:endParaRPr lang="en-US" sz="2400" dirty="0"/>
           </a:p>
@@ -13261,7 +13261,7 @@
                 <a:ea typeface="Calibri" pitchFamily="34" charset="-122"/>
                 <a:cs typeface="Calibri" pitchFamily="34" charset="-120"/>
               </a:rPr>
-              <a:t>It was when the lord of the manor chose a new king</a:t>
+              <a:t>It was the only time physicians visited the village</a:t>
             </a:r>
             <a:endParaRPr lang="en-US" sz="2400" dirty="0"/>
           </a:p>
@@ -13298,7 +13298,7 @@
                 <a:ea typeface="Calibri" pitchFamily="34" charset="-122"/>
                 <a:cs typeface="Calibri" pitchFamily="34" charset="-120"/>
               </a:rPr>
-              <a:t>It was the only time physicians visited the village</a:t>
+              <a:t>A bad harvest meant hunger for the winter and, after several bad years, famine</a:t>
             </a:r>
             <a:endParaRPr lang="en-US" sz="2400" dirty="0"/>
           </a:p>
@@ -14199,7 +14199,7 @@
                 <a:ea typeface="Calibri" pitchFamily="34" charset="-122"/>
                 <a:cs typeface="Calibri" pitchFamily="34" charset="-120"/>
               </a:rPr>
-              <a:t>A   A bad harvest meant hunger for the winter and, after several bad years, famine</a:t>
+              <a:t>D   A bad harvest meant hunger for the winter and, after several bad years, famine</a:t>
             </a:r>
             <a:endParaRPr lang="en-US" sz="2200" dirty="0"/>
           </a:p>

--- a/decks/hist-medicine/hist-medicine_ch1_medieval-england.pptx
+++ b/decks/hist-medicine/hist-medicine_ch1_medieval-england.pptx
@@ -126,31 +126,31 @@
   <p:extLst>
     <p:ext uri="{521415D9-36F7-43E2-AB2F-B90AF26B5E84}">
       <p14:sectionLst xmlns:p14="http://schemas.microsoft.com/office/powerpoint/2010/main">
-        <p14:section name="Opening" id="{2caa3098-5a06-3464-4e3d-d3e87bb2d41d}">
+        <p14:section name="Opening" id="{20a68594-7a45-279a-29f0-0698b1b5ac39}">
           <p14:sldIdLst>
             <p14:sldId id="256"/>
           </p14:sldIdLst>
         </p14:section>
-        <p14:section name="Gate" id="{5fe8448d-56f0-9463-ee73-f3e634079913}">
+        <p14:section name="Gate" id="{81ab430d-b782-ce57-27e9-6675bcf1bcc8}">
           <p14:sldIdLst>
             <p14:sldId id="257"/>
             <p14:sldId id="258"/>
             <p14:sldId id="259"/>
           </p14:sldIdLst>
         </p14:section>
-        <p14:section name="Pre-teach" id="{988901b7-70e9-4c6f-61ad-53f40dcc28b5}">
+        <p14:section name="Pre-teach" id="{c38026b1-fe4c-c7ee-2486-2443f80218ff}">
           <p14:sldIdLst>
             <p14:sldId id="260"/>
             <p14:sldId id="261"/>
           </p14:sldIdLst>
         </p14:section>
-        <p14:section name="Read-along" id="{b8529ce6-6267-3562-11e9-d8faa894332a}">
+        <p14:section name="Read-along" id="{49e1cd07-7184-fb97-6327-d3544ec2f23b}">
           <p14:sldIdLst>
             <p14:sldId id="262"/>
             <p14:sldId id="263"/>
           </p14:sldIdLst>
         </p14:section>
-        <p14:section name="Teach" id="{cb616dc4-321d-2212-d4fa-874a17dd9efe}">
+        <p14:section name="Teach" id="{415350a1-8fe6-c578-39f8-830ed0437270}">
           <p14:sldIdLst>
             <p14:sldId id="264"/>
             <p14:sldId id="265"/>
@@ -158,7 +158,7 @@
             <p14:sldId id="267"/>
           </p14:sldIdLst>
         </p14:section>
-        <p14:section name="Routes" id="{e1cf32aa-493b-6ef0-7174-f27b61ffcb0e}">
+        <p14:section name="Routes" id="{1f11f3fe-0948-7447-6919-2ee8e18a4572}">
           <p14:sldIdLst>
             <p14:sldId id="268"/>
             <p14:sldId id="269"/>
@@ -166,12 +166,12 @@
             <p14:sldId id="271"/>
           </p14:sldIdLst>
         </p14:section>
-        <p14:section name="Close" id="{28b2fa90-8816-6905-79fe-2301d9cb1afe}">
+        <p14:section name="Close" id="{e69840e8-4881-87e2-c913-8710a85f2e60}">
           <p14:sldIdLst>
             <p14:sldId id="272"/>
           </p14:sldIdLst>
         </p14:section>
-        <p14:section name="Answers" id="{16b72e6a-91d8-3fa3-a579-a8c8497377ee}">
+        <p14:section name="Answers" id="{c126c859-6999-968f-eb64-b223856d24ce}">
           <p14:sldIdLst>
             <p14:sldId id="273"/>
             <p14:sldId id="274"/>
